--- a/assets/decks/Module_05_Eggs_Dairy_and_Breakfast.pptx
+++ b/assets/decks/Module_05_Eggs_Dairy_and_Breakfast.pptx
@@ -9563,6 +9563,7 @@
                   <a:srgbClr val="C0392B"/>
                 </a:solidFill>
                 <a:latin typeface="Calibri"/>
+                <a:hlinkClick r:id="rId2"/>
               </a:rPr>
               <a:t>Jacques Pepin - The Secret to Perfectly Cooked Eggs (KQED)</a:t>
             </a:r>
@@ -9605,6 +9606,7 @@
                   <a:srgbClr val="B5651D"/>
                 </a:solidFill>
                 <a:latin typeface="Calibri"/>
+                <a:hlinkClick r:id="rId2"/>
               </a:rPr>
               <a:t>https://www.youtube.com/watch?v=As6AY_ChJuI</a:t>
             </a:r>
@@ -9781,6 +9783,7 @@
                   <a:srgbClr val="C0392B"/>
                 </a:solidFill>
                 <a:latin typeface="Calibri"/>
+                <a:hlinkClick r:id="rId3"/>
               </a:rPr>
               <a:t>Jacques Pepin - Techniques &amp; More (KQED)</a:t>
             </a:r>
@@ -9823,6 +9826,7 @@
                   <a:srgbClr val="B5651D"/>
                 </a:solidFill>
                 <a:latin typeface="Calibri"/>
+                <a:hlinkClick r:id="rId3"/>
               </a:rPr>
               <a:t>https://www.youtube.com/playlist?list=PL435B8F0CB00AF764</a:t>
             </a:r>
@@ -9999,6 +10003,7 @@
                   <a:srgbClr val="C0392B"/>
                 </a:solidFill>
                 <a:latin typeface="Calibri"/>
+                <a:hlinkClick r:id="rId4"/>
               </a:rPr>
               <a:t>Gordon Ramsay (knife &amp; cooking basics)</a:t>
             </a:r>
@@ -10041,6 +10046,7 @@
                   <a:srgbClr val="B5651D"/>
                 </a:solidFill>
                 <a:latin typeface="Calibri"/>
+                <a:hlinkClick r:id="rId4"/>
               </a:rPr>
               <a:t>https://www.youtube.com/@gordonramsay</a:t>
             </a:r>
